--- a/Domingo-21/S02_Domingo-21_1_Post_Feliz-Dia-del-Padre_1x1.pptx
+++ b/Domingo-21/S02_Domingo-21_1_Post_Feliz-Dia-del-Padre_1x1.pptx
@@ -3285,7 +3285,7 @@
         </p:nvSpPr>
         <p:spPr>
           <a:xfrm>
-            <a:off x="777240" y="1716786"/>
+            <a:off x="777240" y="1907286"/>
             <a:ext cx="1371600" cy="146304"/>
           </a:xfrm>
           <a:prstGeom prst="rect">
@@ -3329,8 +3329,8 @@
         </p:nvSpPr>
         <p:spPr>
           <a:xfrm>
-            <a:off x="777240" y="2173986"/>
-            <a:ext cx="6675120" cy="3150108"/>
+            <a:off x="777240" y="2364486"/>
+            <a:ext cx="6675120" cy="2769108"/>
           </a:xfrm>
           <a:prstGeom prst="rect">
             <a:avLst/>
@@ -3349,7 +3349,7 @@
               </a:lnSpc>
             </a:pPr>
             <a:r>
-              <a:rPr sz="6000" b="1">
+              <a:rPr sz="5200" b="1">
                 <a:solidFill>
                   <a:srgbClr val="FFFFFF"/>
                 </a:solidFill>
@@ -3368,8 +3368,8 @@
         </p:nvSpPr>
         <p:spPr>
           <a:xfrm>
-            <a:off x="777240" y="5324094"/>
-            <a:ext cx="6675120" cy="1530858"/>
+            <a:off x="777240" y="5051552"/>
+            <a:ext cx="6675120" cy="1943608"/>
           </a:xfrm>
           <a:prstGeom prst="rect">
             <a:avLst/>
@@ -3394,7 +3394,7 @@
                 </a:solidFill>
                 <a:latin typeface="Inter"/>
               </a:rPr>
-              <a:t>Un poder, un testamento: a veces el regalo es tranquilidad.</a:t>
+              <a:t>Un poder, un testamento: a veces el regalo es tranquilidad. notaly.com.ve</a:t>
             </a:r>
           </a:p>
         </p:txBody>
